--- a/deck/Whence_Submission.pptx
+++ b/deck/Whence_Submission.pptx
@@ -1481,7 +1481,7 @@
                 <a:ea typeface="Segoe UI Light" pitchFamily="34" charset="-122"/>
                 <a:cs typeface="Segoe UI Light" pitchFamily="34" charset="-120"/>
               </a:rPr>
-              <a:t>SENTINEL</a:t>
+              <a:t>WHENCE</a:t>
             </a:r>
             <a:endParaRPr lang="en-US" sz="8000" dirty="0"/>
           </a:p>
@@ -1621,7 +1621,7 @@
                 <a:ea typeface="Segoe UI" pitchFamily="34" charset="-122"/>
                 <a:cs typeface="Segoe UI" pitchFamily="34" charset="-120"/>
               </a:rPr>
-              <a:t>Team SENTINEL</a:t>
+              <a:t>Team WHENCE</a:t>
             </a:r>
             <a:pPr indent="0" marL="0">
               <a:buNone/>
@@ -1745,7 +1745,7 @@
                 <a:ea typeface="Segoe UI" pitchFamily="34" charset="-122"/>
                 <a:cs typeface="Segoe UI" pitchFamily="34" charset="-120"/>
               </a:rPr>
-              <a:t>Team SENTINEL</a:t>
+              <a:t>Team WHENCE</a:t>
             </a:r>
             <a:endParaRPr lang="en-US" sz="3000" dirty="0"/>
           </a:p>
@@ -1784,6 +1784,10 @@
             </a:outerShdw>
           </a:effectLst>
         </p:spPr>
+        <p:txBody>
+          <a:bodyPr/>
+          <a:p/>
+        </p:txBody>
       </p:sp>
       <p:sp>
         <p:nvSpPr>
@@ -2002,6 +2006,10 @@
             </a:outerShdw>
           </a:effectLst>
         </p:spPr>
+        <p:txBody>
+          <a:bodyPr/>
+          <a:p/>
+        </p:txBody>
       </p:sp>
       <p:sp>
         <p:nvSpPr>
@@ -2117,7 +2125,7 @@
                 <a:ea typeface="Segoe UI" pitchFamily="34" charset="-122"/>
                 <a:cs typeface="Segoe UI" pitchFamily="34" charset="-120"/>
               </a:rPr>
-              <a:t>github.com/Harshith029/Sentinel</a:t>
+              <a:t>github.com/Harshith029/Whence</a:t>
             </a:r>
             <a:endParaRPr lang="en-US" sz="1250" dirty="0"/>
           </a:p>
@@ -2686,6 +2694,10 @@
             </a:outerShdw>
           </a:effectLst>
         </p:spPr>
+        <p:txBody>
+          <a:bodyPr/>
+          <a:p/>
+        </p:txBody>
       </p:sp>
       <p:sp>
         <p:nvSpPr>
@@ -2762,7 +2774,7 @@
                 <a:ea typeface="Segoe UI" pitchFamily="34" charset="-122"/>
                 <a:cs typeface="Segoe UI" pitchFamily="34" charset="-120"/>
               </a:rPr>
-              <a:t>Labels the origin of everything the agent sees and authorizes every tool call against that lineage. An action tracing back to untrusted content is blocked — even when the text filter missed the attack. Tools are network-isolated behind SENTINEL: interception can't be bypassed.</a:t>
+              <a:t>Labels the origin of everything the agent sees and authorizes every tool call against that lineage. An action tracing back to untrusted content is blocked — even when the text filter missed the attack. Tools are network-isolated behind WHENCE: interception can't be bypassed.</a:t>
             </a:r>
             <a:endParaRPr lang="en-US" sz="1030" dirty="0"/>
           </a:p>
@@ -2801,6 +2813,10 @@
             </a:outerShdw>
           </a:effectLst>
         </p:spPr>
+        <p:txBody>
+          <a:bodyPr/>
+          <a:p/>
+        </p:txBody>
       </p:sp>
       <p:sp>
         <p:nvSpPr>
@@ -2916,6 +2932,10 @@
             </a:outerShdw>
           </a:effectLst>
         </p:spPr>
+        <p:txBody>
+          <a:bodyPr/>
+          <a:p/>
+        </p:txBody>
       </p:sp>
       <p:sp>
         <p:nvSpPr>
@@ -3031,6 +3051,10 @@
             </a:outerShdw>
           </a:effectLst>
         </p:spPr>
+        <p:txBody>
+          <a:bodyPr/>
+          <a:p/>
+        </p:txBody>
       </p:sp>
       <p:sp>
         <p:nvSpPr>
@@ -3146,6 +3170,10 @@
             </a:outerShdw>
           </a:effectLst>
         </p:spPr>
+        <p:txBody>
+          <a:bodyPr/>
+          <a:p/>
+        </p:txBody>
       </p:sp>
       <p:sp>
         <p:nvSpPr>
@@ -3222,7 +3250,7 @@
                 <a:ea typeface="Segoe UI" pitchFamily="34" charset="-122"/>
                 <a:cs typeface="Segoe UI" pitchFamily="34" charset="-120"/>
               </a:rPr>
-              <a:t>Drop-in: point the agent's tool endpoint at SENTINEL — no SDK, no agent modification. Proven to block attacks that evade Prompt Shields (the architecture, not the filter, stops them).</a:t>
+              <a:t>Drop-in: point the agent's tool endpoint at WHENCE — no SDK, no agent modification. Proven to block attacks that evade Prompt Shields (the architecture, not the filter, stops them).</a:t>
             </a:r>
             <a:endParaRPr lang="en-US" sz="1030" dirty="0"/>
           </a:p>
@@ -3261,6 +3289,10 @@
             </a:outerShdw>
           </a:effectLst>
         </p:spPr>
+        <p:txBody>
+          <a:bodyPr/>
+          <a:p/>
+        </p:txBody>
       </p:sp>
       <p:sp>
         <p:nvSpPr>
@@ -3525,6 +3557,10 @@
             </a:outerShdw>
           </a:effectLst>
         </p:spPr>
+        <p:txBody>
+          <a:bodyPr/>
+          <a:p/>
+        </p:txBody>
       </p:sp>
       <p:sp>
         <p:nvSpPr>
@@ -3644,6 +3680,10 @@
             <a:tailEnd type="triangle"/>
           </a:ln>
         </p:spPr>
+        <p:txBody>
+          <a:bodyPr/>
+          <a:p/>
+        </p:txBody>
       </p:sp>
       <p:sp>
         <p:nvSpPr>
@@ -3678,6 +3718,10 @@
             </a:outerShdw>
           </a:effectLst>
         </p:spPr>
+        <p:txBody>
+          <a:bodyPr/>
+          <a:p/>
+        </p:txBody>
       </p:sp>
       <p:sp>
         <p:nvSpPr>
@@ -3712,7 +3756,7 @@
                 <a:ea typeface="Segoe UI" pitchFamily="34" charset="-122"/>
                 <a:cs typeface="Segoe UI" pitchFamily="34" charset="-120"/>
               </a:rPr>
-              <a:t>SENTINEL</a:t>
+              <a:t>WHENCE</a:t>
             </a:r>
             <a:endParaRPr lang="en-US" sz="1700" dirty="0"/>
           </a:p>
@@ -4221,6 +4265,10 @@
             <a:tailEnd type="triangle"/>
           </a:ln>
         </p:spPr>
+        <p:txBody>
+          <a:bodyPr/>
+          <a:p/>
+        </p:txBody>
       </p:sp>
       <p:sp>
         <p:nvSpPr>
@@ -4255,6 +4303,10 @@
             </a:outerShdw>
           </a:effectLst>
         </p:spPr>
+        <p:txBody>
+          <a:bodyPr/>
+          <a:p/>
+        </p:txBody>
       </p:sp>
       <p:sp>
         <p:nvSpPr>
@@ -4345,7 +4397,7 @@
                 <a:ea typeface="Segoe UI" pitchFamily="34" charset="-122"/>
                 <a:cs typeface="Segoe UI" pitchFamily="34" charset="-120"/>
               </a:rPr>
-              <a:t>isolated behind SENTINEL</a:t>
+              <a:t>isolated behind WHENCE</a:t>
             </a:r>
             <a:endParaRPr lang="en-US" sz="1150" dirty="0"/>
           </a:p>
@@ -4504,7 +4556,7 @@
                 <a:ea typeface="Segoe UI" pitchFamily="34" charset="-122"/>
                 <a:cs typeface="Segoe UI" pitchFamily="34" charset="-120"/>
               </a:rPr>
-              <a:t>Tools are reachable only through SENTINEL — interception is guaranteed by the network itself. Full flow charts and the forensic data model are in the repository.</a:t>
+              <a:t>Tools are reachable only through WHENCE — interception is guaranteed by the network itself. Full flow charts and the forensic data model are in the repository.</a:t>
             </a:r>
             <a:endParaRPr lang="en-US" sz="1200" dirty="0"/>
           </a:p>
@@ -4737,7 +4789,7 @@
                 <a:ea typeface="Segoe UI" pitchFamily="34" charset="-122"/>
                 <a:cs typeface="Segoe UI" pitchFamily="34" charset="-120"/>
               </a:rPr>
-              <a:t>github.com/Harshith029/Sentinel  —  MIT · CI green · 277 tests</a:t>
+              <a:t>github.com/Harshith029/Whence  —  MIT · CI green · 277 tests</a:t>
             </a:r>
             <a:endParaRPr lang="en-US" sz="1200" dirty="0"/>
           </a:p>
@@ -5267,7 +5319,7 @@
                 <a:ea typeface="Segoe UI" pitchFamily="34" charset="-122"/>
                 <a:cs typeface="Segoe UI" pitchFamily="34" charset="-120"/>
               </a:rPr>
-              <a:t>Outbox with vs without SENTINEL: the SSN/API key reach the attacker only when SENTINEL is absent — with it, “never persisted.”</a:t>
+              <a:t>Outbox with vs without WHENCE: the SSN/API key reach the attacker only when WHENCE is absent — with it, “never persisted.”</a:t>
             </a:r>
             <a:endParaRPr lang="en-US" sz="1100" dirty="0"/>
           </a:p>
